--- a/public/videos/repositories/camp-hikaku/camp-hikaku-tech-preview.pptx
+++ b/public/videos/repositories/camp-hikaku/camp-hikaku-tech-preview.pptx
@@ -134,7 +134,7 @@
           <p:cNvPr id="2" name="タイトル 1">
             <a:extLst>
               <a:ext uri="{FF2B5EF4-FFF2-40B4-BE49-F238E27FC236}">
-                <a16:creationId xmlns:a16="http://schemas.microsoft.com/office/drawing/2014/main" id="{283F8CA4-7120-9683-EB35-230434C9F7F6}"/>
+                <a16:creationId xmlns:a16="http://schemas.microsoft.com/office/drawing/2014/main" id="{500CB71A-6983-4E2C-BAE7-9D03C03D0103}"/>
               </a:ext>
             </a:extLst>
           </p:cNvPr>
@@ -171,7 +171,7 @@
           <p:cNvPr id="3" name="字幕 2">
             <a:extLst>
               <a:ext uri="{FF2B5EF4-FFF2-40B4-BE49-F238E27FC236}">
-                <a16:creationId xmlns:a16="http://schemas.microsoft.com/office/drawing/2014/main" id="{91911148-091C-793B-BF96-12731C4C3983}"/>
+                <a16:creationId xmlns:a16="http://schemas.microsoft.com/office/drawing/2014/main" id="{DF41C984-7116-9020-54F4-F675B7506D41}"/>
               </a:ext>
             </a:extLst>
           </p:cNvPr>
@@ -241,7 +241,7 @@
           <p:cNvPr id="4" name="日付プレースホルダー 3">
             <a:extLst>
               <a:ext uri="{FF2B5EF4-FFF2-40B4-BE49-F238E27FC236}">
-                <a16:creationId xmlns:a16="http://schemas.microsoft.com/office/drawing/2014/main" id="{B2ADE520-05BE-A72D-4208-B883638FE1CF}"/>
+                <a16:creationId xmlns:a16="http://schemas.microsoft.com/office/drawing/2014/main" id="{70E17B28-7F43-120D-EA91-D9193A3EB025}"/>
               </a:ext>
             </a:extLst>
           </p:cNvPr>
@@ -257,7 +257,7 @@
           <a:bodyPr/>
           <a:lstStyle/>
           <a:p>
-            <a:fld id="{984F072A-6D4A-444A-AAC8-CC23CBCE9921}" type="datetimeFigureOut">
+            <a:fld id="{F1F22A08-497F-4176-A7BF-25ACA0E4C96B}" type="datetimeFigureOut">
               <a:rPr kumimoji="1" lang="ja-JP" altLang="en-US" smtClean="0"/>
               <a:t>2026/7/30</a:t>
             </a:fld>
@@ -270,7 +270,7 @@
           <p:cNvPr id="5" name="フッター プレースホルダー 4">
             <a:extLst>
               <a:ext uri="{FF2B5EF4-FFF2-40B4-BE49-F238E27FC236}">
-                <a16:creationId xmlns:a16="http://schemas.microsoft.com/office/drawing/2014/main" id="{565EC178-6909-9246-7B12-432C8900F625}"/>
+                <a16:creationId xmlns:a16="http://schemas.microsoft.com/office/drawing/2014/main" id="{6AF6114E-67A8-93BB-AC42-64B23D3C3AD5}"/>
               </a:ext>
             </a:extLst>
           </p:cNvPr>
@@ -295,7 +295,7 @@
           <p:cNvPr id="6" name="スライド番号プレースホルダー 5">
             <a:extLst>
               <a:ext uri="{FF2B5EF4-FFF2-40B4-BE49-F238E27FC236}">
-                <a16:creationId xmlns:a16="http://schemas.microsoft.com/office/drawing/2014/main" id="{CDB1E074-9956-2C58-7D4E-B47B62F4C916}"/>
+                <a16:creationId xmlns:a16="http://schemas.microsoft.com/office/drawing/2014/main" id="{EE4B9567-D7EB-2CA3-4EF6-E14BB3BBA5E6}"/>
               </a:ext>
             </a:extLst>
           </p:cNvPr>
@@ -311,7 +311,7 @@
           <a:bodyPr/>
           <a:lstStyle/>
           <a:p>
-            <a:fld id="{680129E2-1D9C-4741-8125-9461CCD80C3B}" type="slidenum">
+            <a:fld id="{BAB24A02-E561-4B89-B255-7D54E268628B}" type="slidenum">
               <a:rPr kumimoji="1" lang="ja-JP" altLang="en-US" smtClean="0"/>
               <a:t>‹#›</a:t>
             </a:fld>
@@ -322,7 +322,7 @@
     </p:spTree>
     <p:extLst>
       <p:ext uri="{BB962C8B-B14F-4D97-AF65-F5344CB8AC3E}">
-        <p14:creationId xmlns:p14="http://schemas.microsoft.com/office/powerpoint/2010/main" val="3427594384"/>
+        <p14:creationId xmlns:p14="http://schemas.microsoft.com/office/powerpoint/2010/main" val="1342355827"/>
       </p:ext>
     </p:extLst>
   </p:cSld>
@@ -354,7 +354,7 @@
           <p:cNvPr id="2" name="タイトル 1">
             <a:extLst>
               <a:ext uri="{FF2B5EF4-FFF2-40B4-BE49-F238E27FC236}">
-                <a16:creationId xmlns:a16="http://schemas.microsoft.com/office/drawing/2014/main" id="{FFC04593-9426-21C8-9CBE-E4FD3FD57913}"/>
+                <a16:creationId xmlns:a16="http://schemas.microsoft.com/office/drawing/2014/main" id="{767481B0-526D-45D2-F580-5534FCFB1B60}"/>
               </a:ext>
             </a:extLst>
           </p:cNvPr>
@@ -382,7 +382,7 @@
           <p:cNvPr id="3" name="縦書きテキスト プレースホルダー 2">
             <a:extLst>
               <a:ext uri="{FF2B5EF4-FFF2-40B4-BE49-F238E27FC236}">
-                <a16:creationId xmlns:a16="http://schemas.microsoft.com/office/drawing/2014/main" id="{C347F8D2-F0AC-14CC-AA31-3BB5DB60DE2D}"/>
+                <a16:creationId xmlns:a16="http://schemas.microsoft.com/office/drawing/2014/main" id="{9A4B314A-62C5-3DC2-A5A2-965B5989F7F4}"/>
               </a:ext>
             </a:extLst>
           </p:cNvPr>
@@ -471,7 +471,7 @@
           <p:cNvPr id="4" name="日付プレースホルダー 3">
             <a:extLst>
               <a:ext uri="{FF2B5EF4-FFF2-40B4-BE49-F238E27FC236}">
-                <a16:creationId xmlns:a16="http://schemas.microsoft.com/office/drawing/2014/main" id="{B3020E1F-EDCB-40C4-1231-E4D60ACE0493}"/>
+                <a16:creationId xmlns:a16="http://schemas.microsoft.com/office/drawing/2014/main" id="{629943B1-43C6-FA51-7AB3-8EF96EC93C94}"/>
               </a:ext>
             </a:extLst>
           </p:cNvPr>
@@ -487,7 +487,7 @@
           <a:bodyPr/>
           <a:lstStyle/>
           <a:p>
-            <a:fld id="{984F072A-6D4A-444A-AAC8-CC23CBCE9921}" type="datetimeFigureOut">
+            <a:fld id="{F1F22A08-497F-4176-A7BF-25ACA0E4C96B}" type="datetimeFigureOut">
               <a:rPr kumimoji="1" lang="ja-JP" altLang="en-US" smtClean="0"/>
               <a:t>2026/7/30</a:t>
             </a:fld>
@@ -500,7 +500,7 @@
           <p:cNvPr id="5" name="フッター プレースホルダー 4">
             <a:extLst>
               <a:ext uri="{FF2B5EF4-FFF2-40B4-BE49-F238E27FC236}">
-                <a16:creationId xmlns:a16="http://schemas.microsoft.com/office/drawing/2014/main" id="{CDE6A796-3620-84A7-F2D7-276566C296AE}"/>
+                <a16:creationId xmlns:a16="http://schemas.microsoft.com/office/drawing/2014/main" id="{C948C533-6417-75A5-45E3-03BB57B10425}"/>
               </a:ext>
             </a:extLst>
           </p:cNvPr>
@@ -525,7 +525,7 @@
           <p:cNvPr id="6" name="スライド番号プレースホルダー 5">
             <a:extLst>
               <a:ext uri="{FF2B5EF4-FFF2-40B4-BE49-F238E27FC236}">
-                <a16:creationId xmlns:a16="http://schemas.microsoft.com/office/drawing/2014/main" id="{3794FA6A-4B60-D5B4-DC02-BD8027707C05}"/>
+                <a16:creationId xmlns:a16="http://schemas.microsoft.com/office/drawing/2014/main" id="{E4F30023-672B-B4E0-EEC4-1456B5244D17}"/>
               </a:ext>
             </a:extLst>
           </p:cNvPr>
@@ -541,7 +541,7 @@
           <a:bodyPr/>
           <a:lstStyle/>
           <a:p>
-            <a:fld id="{680129E2-1D9C-4741-8125-9461CCD80C3B}" type="slidenum">
+            <a:fld id="{BAB24A02-E561-4B89-B255-7D54E268628B}" type="slidenum">
               <a:rPr kumimoji="1" lang="ja-JP" altLang="en-US" smtClean="0"/>
               <a:t>‹#›</a:t>
             </a:fld>
@@ -552,7 +552,7 @@
     </p:spTree>
     <p:extLst>
       <p:ext uri="{BB962C8B-B14F-4D97-AF65-F5344CB8AC3E}">
-        <p14:creationId xmlns:p14="http://schemas.microsoft.com/office/powerpoint/2010/main" val="4193494933"/>
+        <p14:creationId xmlns:p14="http://schemas.microsoft.com/office/powerpoint/2010/main" val="1684464532"/>
       </p:ext>
     </p:extLst>
   </p:cSld>
@@ -584,7 +584,7 @@
           <p:cNvPr id="2" name="縦書きタイトル 1">
             <a:extLst>
               <a:ext uri="{FF2B5EF4-FFF2-40B4-BE49-F238E27FC236}">
-                <a16:creationId xmlns:a16="http://schemas.microsoft.com/office/drawing/2014/main" id="{F5DB83D8-8D9A-43CE-A0BF-71855F6B7B80}"/>
+                <a16:creationId xmlns:a16="http://schemas.microsoft.com/office/drawing/2014/main" id="{5610F881-ECEC-0FA3-4BFD-60D2EAC05AD2}"/>
               </a:ext>
             </a:extLst>
           </p:cNvPr>
@@ -617,7 +617,7 @@
           <p:cNvPr id="3" name="縦書きテキスト プレースホルダー 2">
             <a:extLst>
               <a:ext uri="{FF2B5EF4-FFF2-40B4-BE49-F238E27FC236}">
-                <a16:creationId xmlns:a16="http://schemas.microsoft.com/office/drawing/2014/main" id="{A074F56B-C152-A177-4C68-AAEF48E7236C}"/>
+                <a16:creationId xmlns:a16="http://schemas.microsoft.com/office/drawing/2014/main" id="{09744398-8DA3-4A74-E6FA-EEAF64248073}"/>
               </a:ext>
             </a:extLst>
           </p:cNvPr>
@@ -711,7 +711,7 @@
           <p:cNvPr id="4" name="日付プレースホルダー 3">
             <a:extLst>
               <a:ext uri="{FF2B5EF4-FFF2-40B4-BE49-F238E27FC236}">
-                <a16:creationId xmlns:a16="http://schemas.microsoft.com/office/drawing/2014/main" id="{FBBCD2C3-FD98-A0F4-FB15-3C030E7A49D4}"/>
+                <a16:creationId xmlns:a16="http://schemas.microsoft.com/office/drawing/2014/main" id="{47320ECE-1BB9-8D0F-737B-E0EF69B0AA91}"/>
               </a:ext>
             </a:extLst>
           </p:cNvPr>
@@ -727,7 +727,7 @@
           <a:bodyPr/>
           <a:lstStyle/>
           <a:p>
-            <a:fld id="{984F072A-6D4A-444A-AAC8-CC23CBCE9921}" type="datetimeFigureOut">
+            <a:fld id="{F1F22A08-497F-4176-A7BF-25ACA0E4C96B}" type="datetimeFigureOut">
               <a:rPr kumimoji="1" lang="ja-JP" altLang="en-US" smtClean="0"/>
               <a:t>2026/7/30</a:t>
             </a:fld>
@@ -740,7 +740,7 @@
           <p:cNvPr id="5" name="フッター プレースホルダー 4">
             <a:extLst>
               <a:ext uri="{FF2B5EF4-FFF2-40B4-BE49-F238E27FC236}">
-                <a16:creationId xmlns:a16="http://schemas.microsoft.com/office/drawing/2014/main" id="{D83A4F7B-930E-C272-61B5-09BD6F010748}"/>
+                <a16:creationId xmlns:a16="http://schemas.microsoft.com/office/drawing/2014/main" id="{5AA91A06-CD66-B53B-288E-401C5611A0B6}"/>
               </a:ext>
             </a:extLst>
           </p:cNvPr>
@@ -765,7 +765,7 @@
           <p:cNvPr id="6" name="スライド番号プレースホルダー 5">
             <a:extLst>
               <a:ext uri="{FF2B5EF4-FFF2-40B4-BE49-F238E27FC236}">
-                <a16:creationId xmlns:a16="http://schemas.microsoft.com/office/drawing/2014/main" id="{47644227-7D7A-9FD2-293E-3BF30F11167C}"/>
+                <a16:creationId xmlns:a16="http://schemas.microsoft.com/office/drawing/2014/main" id="{7FAAC9BA-213F-327C-124C-06A3B3F6E1AA}"/>
               </a:ext>
             </a:extLst>
           </p:cNvPr>
@@ -781,7 +781,7 @@
           <a:bodyPr/>
           <a:lstStyle/>
           <a:p>
-            <a:fld id="{680129E2-1D9C-4741-8125-9461CCD80C3B}" type="slidenum">
+            <a:fld id="{BAB24A02-E561-4B89-B255-7D54E268628B}" type="slidenum">
               <a:rPr kumimoji="1" lang="ja-JP" altLang="en-US" smtClean="0"/>
               <a:t>‹#›</a:t>
             </a:fld>
@@ -792,7 +792,7 @@
     </p:spTree>
     <p:extLst>
       <p:ext uri="{BB962C8B-B14F-4D97-AF65-F5344CB8AC3E}">
-        <p14:creationId xmlns:p14="http://schemas.microsoft.com/office/powerpoint/2010/main" val="3274579013"/>
+        <p14:creationId xmlns:p14="http://schemas.microsoft.com/office/powerpoint/2010/main" val="4266658010"/>
       </p:ext>
     </p:extLst>
   </p:cSld>
@@ -824,7 +824,7 @@
           <p:cNvPr id="2" name="タイトル 1">
             <a:extLst>
               <a:ext uri="{FF2B5EF4-FFF2-40B4-BE49-F238E27FC236}">
-                <a16:creationId xmlns:a16="http://schemas.microsoft.com/office/drawing/2014/main" id="{B9FF5665-0233-3E16-CEF3-66B045BF2F16}"/>
+                <a16:creationId xmlns:a16="http://schemas.microsoft.com/office/drawing/2014/main" id="{31B78B43-8DD9-BC50-7EFA-5C8885339B21}"/>
               </a:ext>
             </a:extLst>
           </p:cNvPr>
@@ -852,7 +852,7 @@
           <p:cNvPr id="3" name="コンテンツ プレースホルダー 2">
             <a:extLst>
               <a:ext uri="{FF2B5EF4-FFF2-40B4-BE49-F238E27FC236}">
-                <a16:creationId xmlns:a16="http://schemas.microsoft.com/office/drawing/2014/main" id="{7329D26C-E6B9-DA3E-0CA7-BE1E7AECF55A}"/>
+                <a16:creationId xmlns:a16="http://schemas.microsoft.com/office/drawing/2014/main" id="{03011287-C1F1-6EF3-C920-86FA7EF2F2A3}"/>
               </a:ext>
             </a:extLst>
           </p:cNvPr>
@@ -941,7 +941,7 @@
           <p:cNvPr id="4" name="日付プレースホルダー 3">
             <a:extLst>
               <a:ext uri="{FF2B5EF4-FFF2-40B4-BE49-F238E27FC236}">
-                <a16:creationId xmlns:a16="http://schemas.microsoft.com/office/drawing/2014/main" id="{206E30FF-F500-ADBA-3219-563E396EF1BE}"/>
+                <a16:creationId xmlns:a16="http://schemas.microsoft.com/office/drawing/2014/main" id="{82DA9582-5302-1096-A023-8DE627D77822}"/>
               </a:ext>
             </a:extLst>
           </p:cNvPr>
@@ -957,7 +957,7 @@
           <a:bodyPr/>
           <a:lstStyle/>
           <a:p>
-            <a:fld id="{984F072A-6D4A-444A-AAC8-CC23CBCE9921}" type="datetimeFigureOut">
+            <a:fld id="{F1F22A08-497F-4176-A7BF-25ACA0E4C96B}" type="datetimeFigureOut">
               <a:rPr kumimoji="1" lang="ja-JP" altLang="en-US" smtClean="0"/>
               <a:t>2026/7/30</a:t>
             </a:fld>
@@ -970,7 +970,7 @@
           <p:cNvPr id="5" name="フッター プレースホルダー 4">
             <a:extLst>
               <a:ext uri="{FF2B5EF4-FFF2-40B4-BE49-F238E27FC236}">
-                <a16:creationId xmlns:a16="http://schemas.microsoft.com/office/drawing/2014/main" id="{CDB38EAE-790F-887C-9826-C5B613B994A3}"/>
+                <a16:creationId xmlns:a16="http://schemas.microsoft.com/office/drawing/2014/main" id="{CD5A7410-F6AF-4129-50CE-C7A880166CAB}"/>
               </a:ext>
             </a:extLst>
           </p:cNvPr>
@@ -995,7 +995,7 @@
           <p:cNvPr id="6" name="スライド番号プレースホルダー 5">
             <a:extLst>
               <a:ext uri="{FF2B5EF4-FFF2-40B4-BE49-F238E27FC236}">
-                <a16:creationId xmlns:a16="http://schemas.microsoft.com/office/drawing/2014/main" id="{72682CBC-1906-109B-980E-61B52B422FAD}"/>
+                <a16:creationId xmlns:a16="http://schemas.microsoft.com/office/drawing/2014/main" id="{537596B9-3994-68B1-7A1A-C941560611DE}"/>
               </a:ext>
             </a:extLst>
           </p:cNvPr>
@@ -1011,7 +1011,7 @@
           <a:bodyPr/>
           <a:lstStyle/>
           <a:p>
-            <a:fld id="{680129E2-1D9C-4741-8125-9461CCD80C3B}" type="slidenum">
+            <a:fld id="{BAB24A02-E561-4B89-B255-7D54E268628B}" type="slidenum">
               <a:rPr kumimoji="1" lang="ja-JP" altLang="en-US" smtClean="0"/>
               <a:t>‹#›</a:t>
             </a:fld>
@@ -1022,7 +1022,7 @@
     </p:spTree>
     <p:extLst>
       <p:ext uri="{BB962C8B-B14F-4D97-AF65-F5344CB8AC3E}">
-        <p14:creationId xmlns:p14="http://schemas.microsoft.com/office/powerpoint/2010/main" val="228330892"/>
+        <p14:creationId xmlns:p14="http://schemas.microsoft.com/office/powerpoint/2010/main" val="1980251167"/>
       </p:ext>
     </p:extLst>
   </p:cSld>
@@ -1054,7 +1054,7 @@
           <p:cNvPr id="2" name="タイトル 1">
             <a:extLst>
               <a:ext uri="{FF2B5EF4-FFF2-40B4-BE49-F238E27FC236}">
-                <a16:creationId xmlns:a16="http://schemas.microsoft.com/office/drawing/2014/main" id="{3225B346-3BD5-A252-D323-30BD1868E327}"/>
+                <a16:creationId xmlns:a16="http://schemas.microsoft.com/office/drawing/2014/main" id="{646E6D9F-ECF5-9FD9-AD32-B525E8C173B8}"/>
               </a:ext>
             </a:extLst>
           </p:cNvPr>
@@ -1091,7 +1091,7 @@
           <p:cNvPr id="3" name="テキスト プレースホルダー 2">
             <a:extLst>
               <a:ext uri="{FF2B5EF4-FFF2-40B4-BE49-F238E27FC236}">
-                <a16:creationId xmlns:a16="http://schemas.microsoft.com/office/drawing/2014/main" id="{DE6EF449-BE1B-E159-E04E-53CDFE91AB93}"/>
+                <a16:creationId xmlns:a16="http://schemas.microsoft.com/office/drawing/2014/main" id="{6D2E10CD-5AC4-0DBA-482C-0AAF9E38F39D}"/>
               </a:ext>
             </a:extLst>
           </p:cNvPr>
@@ -1216,7 +1216,7 @@
           <p:cNvPr id="4" name="日付プレースホルダー 3">
             <a:extLst>
               <a:ext uri="{FF2B5EF4-FFF2-40B4-BE49-F238E27FC236}">
-                <a16:creationId xmlns:a16="http://schemas.microsoft.com/office/drawing/2014/main" id="{96D92011-1E15-7D14-16EA-E4A5CC7C3DC4}"/>
+                <a16:creationId xmlns:a16="http://schemas.microsoft.com/office/drawing/2014/main" id="{6AF335AE-BA9F-C355-9D04-0E2B34C85FFA}"/>
               </a:ext>
             </a:extLst>
           </p:cNvPr>
@@ -1232,7 +1232,7 @@
           <a:bodyPr/>
           <a:lstStyle/>
           <a:p>
-            <a:fld id="{984F072A-6D4A-444A-AAC8-CC23CBCE9921}" type="datetimeFigureOut">
+            <a:fld id="{F1F22A08-497F-4176-A7BF-25ACA0E4C96B}" type="datetimeFigureOut">
               <a:rPr kumimoji="1" lang="ja-JP" altLang="en-US" smtClean="0"/>
               <a:t>2026/7/30</a:t>
             </a:fld>
@@ -1245,7 +1245,7 @@
           <p:cNvPr id="5" name="フッター プレースホルダー 4">
             <a:extLst>
               <a:ext uri="{FF2B5EF4-FFF2-40B4-BE49-F238E27FC236}">
-                <a16:creationId xmlns:a16="http://schemas.microsoft.com/office/drawing/2014/main" id="{D5F4970D-0AEB-2A3C-4B1C-DF973E431BA9}"/>
+                <a16:creationId xmlns:a16="http://schemas.microsoft.com/office/drawing/2014/main" id="{CCD1BCEA-118F-9D21-E13A-463609D83FC0}"/>
               </a:ext>
             </a:extLst>
           </p:cNvPr>
@@ -1270,7 +1270,7 @@
           <p:cNvPr id="6" name="スライド番号プレースホルダー 5">
             <a:extLst>
               <a:ext uri="{FF2B5EF4-FFF2-40B4-BE49-F238E27FC236}">
-                <a16:creationId xmlns:a16="http://schemas.microsoft.com/office/drawing/2014/main" id="{395E32DA-07C6-2A0A-F364-E47C6CB6FA82}"/>
+                <a16:creationId xmlns:a16="http://schemas.microsoft.com/office/drawing/2014/main" id="{FFD46193-C896-942E-585C-62D800937639}"/>
               </a:ext>
             </a:extLst>
           </p:cNvPr>
@@ -1286,7 +1286,7 @@
           <a:bodyPr/>
           <a:lstStyle/>
           <a:p>
-            <a:fld id="{680129E2-1D9C-4741-8125-9461CCD80C3B}" type="slidenum">
+            <a:fld id="{BAB24A02-E561-4B89-B255-7D54E268628B}" type="slidenum">
               <a:rPr kumimoji="1" lang="ja-JP" altLang="en-US" smtClean="0"/>
               <a:t>‹#›</a:t>
             </a:fld>
@@ -1297,7 +1297,7 @@
     </p:spTree>
     <p:extLst>
       <p:ext uri="{BB962C8B-B14F-4D97-AF65-F5344CB8AC3E}">
-        <p14:creationId xmlns:p14="http://schemas.microsoft.com/office/powerpoint/2010/main" val="3484823563"/>
+        <p14:creationId xmlns:p14="http://schemas.microsoft.com/office/powerpoint/2010/main" val="3286867875"/>
       </p:ext>
     </p:extLst>
   </p:cSld>
@@ -1329,7 +1329,7 @@
           <p:cNvPr id="2" name="タイトル 1">
             <a:extLst>
               <a:ext uri="{FF2B5EF4-FFF2-40B4-BE49-F238E27FC236}">
-                <a16:creationId xmlns:a16="http://schemas.microsoft.com/office/drawing/2014/main" id="{4F2A3686-1A0D-E235-AA1E-BBA860045EF4}"/>
+                <a16:creationId xmlns:a16="http://schemas.microsoft.com/office/drawing/2014/main" id="{3A4B87FF-8F39-0BD5-1284-DB947C64B4D2}"/>
               </a:ext>
             </a:extLst>
           </p:cNvPr>
@@ -1357,7 +1357,7 @@
           <p:cNvPr id="3" name="コンテンツ プレースホルダー 2">
             <a:extLst>
               <a:ext uri="{FF2B5EF4-FFF2-40B4-BE49-F238E27FC236}">
-                <a16:creationId xmlns:a16="http://schemas.microsoft.com/office/drawing/2014/main" id="{9401AB0B-D98C-68B5-F044-F2DA53CE840F}"/>
+                <a16:creationId xmlns:a16="http://schemas.microsoft.com/office/drawing/2014/main" id="{6407E121-5A83-05F9-BF2B-D6982564D6C2}"/>
               </a:ext>
             </a:extLst>
           </p:cNvPr>
@@ -1451,7 +1451,7 @@
           <p:cNvPr id="4" name="コンテンツ プレースホルダー 3">
             <a:extLst>
               <a:ext uri="{FF2B5EF4-FFF2-40B4-BE49-F238E27FC236}">
-                <a16:creationId xmlns:a16="http://schemas.microsoft.com/office/drawing/2014/main" id="{16C76E2F-8549-25A4-416B-D5D1261CEFD1}"/>
+                <a16:creationId xmlns:a16="http://schemas.microsoft.com/office/drawing/2014/main" id="{54C86ECB-3067-AF1A-B952-B279ECE47D3C}"/>
               </a:ext>
             </a:extLst>
           </p:cNvPr>
@@ -1545,7 +1545,7 @@
           <p:cNvPr id="5" name="日付プレースホルダー 4">
             <a:extLst>
               <a:ext uri="{FF2B5EF4-FFF2-40B4-BE49-F238E27FC236}">
-                <a16:creationId xmlns:a16="http://schemas.microsoft.com/office/drawing/2014/main" id="{267C4F22-4D55-43A5-C371-4D211B52CDEA}"/>
+                <a16:creationId xmlns:a16="http://schemas.microsoft.com/office/drawing/2014/main" id="{157A8310-AE33-26E0-12EA-02F6669288E1}"/>
               </a:ext>
             </a:extLst>
           </p:cNvPr>
@@ -1561,7 +1561,7 @@
           <a:bodyPr/>
           <a:lstStyle/>
           <a:p>
-            <a:fld id="{984F072A-6D4A-444A-AAC8-CC23CBCE9921}" type="datetimeFigureOut">
+            <a:fld id="{F1F22A08-497F-4176-A7BF-25ACA0E4C96B}" type="datetimeFigureOut">
               <a:rPr kumimoji="1" lang="ja-JP" altLang="en-US" smtClean="0"/>
               <a:t>2026/7/30</a:t>
             </a:fld>
@@ -1574,7 +1574,7 @@
           <p:cNvPr id="6" name="フッター プレースホルダー 5">
             <a:extLst>
               <a:ext uri="{FF2B5EF4-FFF2-40B4-BE49-F238E27FC236}">
-                <a16:creationId xmlns:a16="http://schemas.microsoft.com/office/drawing/2014/main" id="{B7085B05-3806-09F0-A957-604C656ADD3C}"/>
+                <a16:creationId xmlns:a16="http://schemas.microsoft.com/office/drawing/2014/main" id="{955F519D-FFDD-4B26-86FC-C59042A9D151}"/>
               </a:ext>
             </a:extLst>
           </p:cNvPr>
@@ -1599,7 +1599,7 @@
           <p:cNvPr id="7" name="スライド番号プレースホルダー 6">
             <a:extLst>
               <a:ext uri="{FF2B5EF4-FFF2-40B4-BE49-F238E27FC236}">
-                <a16:creationId xmlns:a16="http://schemas.microsoft.com/office/drawing/2014/main" id="{FB51FBB8-7C32-A217-97F5-621C88BD6113}"/>
+                <a16:creationId xmlns:a16="http://schemas.microsoft.com/office/drawing/2014/main" id="{9AD9BE5C-6982-7D4E-D4F8-A196D1DDDA83}"/>
               </a:ext>
             </a:extLst>
           </p:cNvPr>
@@ -1615,7 +1615,7 @@
           <a:bodyPr/>
           <a:lstStyle/>
           <a:p>
-            <a:fld id="{680129E2-1D9C-4741-8125-9461CCD80C3B}" type="slidenum">
+            <a:fld id="{BAB24A02-E561-4B89-B255-7D54E268628B}" type="slidenum">
               <a:rPr kumimoji="1" lang="ja-JP" altLang="en-US" smtClean="0"/>
               <a:t>‹#›</a:t>
             </a:fld>
@@ -1626,7 +1626,7 @@
     </p:spTree>
     <p:extLst>
       <p:ext uri="{BB962C8B-B14F-4D97-AF65-F5344CB8AC3E}">
-        <p14:creationId xmlns:p14="http://schemas.microsoft.com/office/powerpoint/2010/main" val="45082810"/>
+        <p14:creationId xmlns:p14="http://schemas.microsoft.com/office/powerpoint/2010/main" val="2151008606"/>
       </p:ext>
     </p:extLst>
   </p:cSld>
@@ -1658,7 +1658,7 @@
           <p:cNvPr id="2" name="タイトル 1">
             <a:extLst>
               <a:ext uri="{FF2B5EF4-FFF2-40B4-BE49-F238E27FC236}">
-                <a16:creationId xmlns:a16="http://schemas.microsoft.com/office/drawing/2014/main" id="{9AA785F2-A002-D795-E3D9-C9ED5EC5252D}"/>
+                <a16:creationId xmlns:a16="http://schemas.microsoft.com/office/drawing/2014/main" id="{E792836D-773B-A5F4-9AE5-361B72388F81}"/>
               </a:ext>
             </a:extLst>
           </p:cNvPr>
@@ -1691,7 +1691,7 @@
           <p:cNvPr id="3" name="テキスト プレースホルダー 2">
             <a:extLst>
               <a:ext uri="{FF2B5EF4-FFF2-40B4-BE49-F238E27FC236}">
-                <a16:creationId xmlns:a16="http://schemas.microsoft.com/office/drawing/2014/main" id="{41F00875-5BDB-0316-5852-ABD68270C42E}"/>
+                <a16:creationId xmlns:a16="http://schemas.microsoft.com/office/drawing/2014/main" id="{B2DFADD6-1951-5B7B-3FE3-E646A15A3D6D}"/>
               </a:ext>
             </a:extLst>
           </p:cNvPr>
@@ -1762,7 +1762,7 @@
           <p:cNvPr id="4" name="コンテンツ プレースホルダー 3">
             <a:extLst>
               <a:ext uri="{FF2B5EF4-FFF2-40B4-BE49-F238E27FC236}">
-                <a16:creationId xmlns:a16="http://schemas.microsoft.com/office/drawing/2014/main" id="{B777EC16-533F-273B-B4EB-060D3CC0D9FD}"/>
+                <a16:creationId xmlns:a16="http://schemas.microsoft.com/office/drawing/2014/main" id="{0B892099-4F1E-A5CF-DE21-81A4A5A6E631}"/>
               </a:ext>
             </a:extLst>
           </p:cNvPr>
@@ -1856,7 +1856,7 @@
           <p:cNvPr id="5" name="テキスト プレースホルダー 4">
             <a:extLst>
               <a:ext uri="{FF2B5EF4-FFF2-40B4-BE49-F238E27FC236}">
-                <a16:creationId xmlns:a16="http://schemas.microsoft.com/office/drawing/2014/main" id="{A4B795B3-5A23-BF6B-95E7-CEE40C8F6224}"/>
+                <a16:creationId xmlns:a16="http://schemas.microsoft.com/office/drawing/2014/main" id="{9EC28DF5-E09B-8DFE-6443-04B032B37E5E}"/>
               </a:ext>
             </a:extLst>
           </p:cNvPr>
@@ -1927,7 +1927,7 @@
           <p:cNvPr id="6" name="コンテンツ プレースホルダー 5">
             <a:extLst>
               <a:ext uri="{FF2B5EF4-FFF2-40B4-BE49-F238E27FC236}">
-                <a16:creationId xmlns:a16="http://schemas.microsoft.com/office/drawing/2014/main" id="{79D70BED-8C23-4F1A-77AA-6E96884DA54E}"/>
+                <a16:creationId xmlns:a16="http://schemas.microsoft.com/office/drawing/2014/main" id="{019DC45F-7ABE-0D56-63A4-D37C983165DD}"/>
               </a:ext>
             </a:extLst>
           </p:cNvPr>
@@ -2021,7 +2021,7 @@
           <p:cNvPr id="7" name="日付プレースホルダー 6">
             <a:extLst>
               <a:ext uri="{FF2B5EF4-FFF2-40B4-BE49-F238E27FC236}">
-                <a16:creationId xmlns:a16="http://schemas.microsoft.com/office/drawing/2014/main" id="{9806295A-CF55-D5A1-5A49-0B2027E6B90A}"/>
+                <a16:creationId xmlns:a16="http://schemas.microsoft.com/office/drawing/2014/main" id="{D67D8AFA-C190-91CF-C4CC-C0A7E12EB122}"/>
               </a:ext>
             </a:extLst>
           </p:cNvPr>
@@ -2037,7 +2037,7 @@
           <a:bodyPr/>
           <a:lstStyle/>
           <a:p>
-            <a:fld id="{984F072A-6D4A-444A-AAC8-CC23CBCE9921}" type="datetimeFigureOut">
+            <a:fld id="{F1F22A08-497F-4176-A7BF-25ACA0E4C96B}" type="datetimeFigureOut">
               <a:rPr kumimoji="1" lang="ja-JP" altLang="en-US" smtClean="0"/>
               <a:t>2026/7/30</a:t>
             </a:fld>
@@ -2050,7 +2050,7 @@
           <p:cNvPr id="8" name="フッター プレースホルダー 7">
             <a:extLst>
               <a:ext uri="{FF2B5EF4-FFF2-40B4-BE49-F238E27FC236}">
-                <a16:creationId xmlns:a16="http://schemas.microsoft.com/office/drawing/2014/main" id="{DC375B5F-9329-0EB5-3F14-D86C842654F3}"/>
+                <a16:creationId xmlns:a16="http://schemas.microsoft.com/office/drawing/2014/main" id="{F735F71B-276D-8DEC-BA81-AA41F1147080}"/>
               </a:ext>
             </a:extLst>
           </p:cNvPr>
@@ -2075,7 +2075,7 @@
           <p:cNvPr id="9" name="スライド番号プレースホルダー 8">
             <a:extLst>
               <a:ext uri="{FF2B5EF4-FFF2-40B4-BE49-F238E27FC236}">
-                <a16:creationId xmlns:a16="http://schemas.microsoft.com/office/drawing/2014/main" id="{757D2E7C-6A98-451B-1289-701050031346}"/>
+                <a16:creationId xmlns:a16="http://schemas.microsoft.com/office/drawing/2014/main" id="{705C70D6-7C50-B463-236D-7476C643E806}"/>
               </a:ext>
             </a:extLst>
           </p:cNvPr>
@@ -2091,7 +2091,7 @@
           <a:bodyPr/>
           <a:lstStyle/>
           <a:p>
-            <a:fld id="{680129E2-1D9C-4741-8125-9461CCD80C3B}" type="slidenum">
+            <a:fld id="{BAB24A02-E561-4B89-B255-7D54E268628B}" type="slidenum">
               <a:rPr kumimoji="1" lang="ja-JP" altLang="en-US" smtClean="0"/>
               <a:t>‹#›</a:t>
             </a:fld>
@@ -2102,7 +2102,7 @@
     </p:spTree>
     <p:extLst>
       <p:ext uri="{BB962C8B-B14F-4D97-AF65-F5344CB8AC3E}">
-        <p14:creationId xmlns:p14="http://schemas.microsoft.com/office/powerpoint/2010/main" val="246906257"/>
+        <p14:creationId xmlns:p14="http://schemas.microsoft.com/office/powerpoint/2010/main" val="4085019406"/>
       </p:ext>
     </p:extLst>
   </p:cSld>
@@ -2134,7 +2134,7 @@
           <p:cNvPr id="2" name="タイトル 1">
             <a:extLst>
               <a:ext uri="{FF2B5EF4-FFF2-40B4-BE49-F238E27FC236}">
-                <a16:creationId xmlns:a16="http://schemas.microsoft.com/office/drawing/2014/main" id="{A20C74F0-B90A-EC88-8356-03CBC2BA5DEE}"/>
+                <a16:creationId xmlns:a16="http://schemas.microsoft.com/office/drawing/2014/main" id="{18899EC9-9C41-C10E-5EDE-4363D8352BA4}"/>
               </a:ext>
             </a:extLst>
           </p:cNvPr>
@@ -2162,7 +2162,7 @@
           <p:cNvPr id="3" name="日付プレースホルダー 2">
             <a:extLst>
               <a:ext uri="{FF2B5EF4-FFF2-40B4-BE49-F238E27FC236}">
-                <a16:creationId xmlns:a16="http://schemas.microsoft.com/office/drawing/2014/main" id="{58E436BE-F875-4C34-75F2-C2ADAAE3ABFA}"/>
+                <a16:creationId xmlns:a16="http://schemas.microsoft.com/office/drawing/2014/main" id="{C70C69F0-986E-7CC2-205D-08632F0AF866}"/>
               </a:ext>
             </a:extLst>
           </p:cNvPr>
@@ -2178,7 +2178,7 @@
           <a:bodyPr/>
           <a:lstStyle/>
           <a:p>
-            <a:fld id="{984F072A-6D4A-444A-AAC8-CC23CBCE9921}" type="datetimeFigureOut">
+            <a:fld id="{F1F22A08-497F-4176-A7BF-25ACA0E4C96B}" type="datetimeFigureOut">
               <a:rPr kumimoji="1" lang="ja-JP" altLang="en-US" smtClean="0"/>
               <a:t>2026/7/30</a:t>
             </a:fld>
@@ -2191,7 +2191,7 @@
           <p:cNvPr id="4" name="フッター プレースホルダー 3">
             <a:extLst>
               <a:ext uri="{FF2B5EF4-FFF2-40B4-BE49-F238E27FC236}">
-                <a16:creationId xmlns:a16="http://schemas.microsoft.com/office/drawing/2014/main" id="{438B3C1A-5521-CD22-66BB-F18E1610C19A}"/>
+                <a16:creationId xmlns:a16="http://schemas.microsoft.com/office/drawing/2014/main" id="{6BF2CCBE-8E4A-604D-5B18-A9CD66DA1FB4}"/>
               </a:ext>
             </a:extLst>
           </p:cNvPr>
@@ -2216,7 +2216,7 @@
           <p:cNvPr id="5" name="スライド番号プレースホルダー 4">
             <a:extLst>
               <a:ext uri="{FF2B5EF4-FFF2-40B4-BE49-F238E27FC236}">
-                <a16:creationId xmlns:a16="http://schemas.microsoft.com/office/drawing/2014/main" id="{0209D8A5-587C-C4F5-DBB0-E838DAD7BBC8}"/>
+                <a16:creationId xmlns:a16="http://schemas.microsoft.com/office/drawing/2014/main" id="{054CA9B5-C4F8-7D58-47C3-ABCD4B00B0F0}"/>
               </a:ext>
             </a:extLst>
           </p:cNvPr>
@@ -2232,7 +2232,7 @@
           <a:bodyPr/>
           <a:lstStyle/>
           <a:p>
-            <a:fld id="{680129E2-1D9C-4741-8125-9461CCD80C3B}" type="slidenum">
+            <a:fld id="{BAB24A02-E561-4B89-B255-7D54E268628B}" type="slidenum">
               <a:rPr kumimoji="1" lang="ja-JP" altLang="en-US" smtClean="0"/>
               <a:t>‹#›</a:t>
             </a:fld>
@@ -2243,7 +2243,7 @@
     </p:spTree>
     <p:extLst>
       <p:ext uri="{BB962C8B-B14F-4D97-AF65-F5344CB8AC3E}">
-        <p14:creationId xmlns:p14="http://schemas.microsoft.com/office/powerpoint/2010/main" val="2443419110"/>
+        <p14:creationId xmlns:p14="http://schemas.microsoft.com/office/powerpoint/2010/main" val="1047068718"/>
       </p:ext>
     </p:extLst>
   </p:cSld>
@@ -2275,7 +2275,7 @@
           <p:cNvPr id="2" name="日付プレースホルダー 1">
             <a:extLst>
               <a:ext uri="{FF2B5EF4-FFF2-40B4-BE49-F238E27FC236}">
-                <a16:creationId xmlns:a16="http://schemas.microsoft.com/office/drawing/2014/main" id="{3AB2A6F9-5A00-4425-743B-A96B33251516}"/>
+                <a16:creationId xmlns:a16="http://schemas.microsoft.com/office/drawing/2014/main" id="{1442B18D-96E9-A9A4-C2FE-C793CFA0C18F}"/>
               </a:ext>
             </a:extLst>
           </p:cNvPr>
@@ -2291,7 +2291,7 @@
           <a:bodyPr/>
           <a:lstStyle/>
           <a:p>
-            <a:fld id="{984F072A-6D4A-444A-AAC8-CC23CBCE9921}" type="datetimeFigureOut">
+            <a:fld id="{F1F22A08-497F-4176-A7BF-25ACA0E4C96B}" type="datetimeFigureOut">
               <a:rPr kumimoji="1" lang="ja-JP" altLang="en-US" smtClean="0"/>
               <a:t>2026/7/30</a:t>
             </a:fld>
@@ -2304,7 +2304,7 @@
           <p:cNvPr id="3" name="フッター プレースホルダー 2">
             <a:extLst>
               <a:ext uri="{FF2B5EF4-FFF2-40B4-BE49-F238E27FC236}">
-                <a16:creationId xmlns:a16="http://schemas.microsoft.com/office/drawing/2014/main" id="{331E3874-FCD8-03AA-ECB2-149A16647E85}"/>
+                <a16:creationId xmlns:a16="http://schemas.microsoft.com/office/drawing/2014/main" id="{77098487-3B8B-BD20-4E92-6E4D4CD69F64}"/>
               </a:ext>
             </a:extLst>
           </p:cNvPr>
@@ -2329,7 +2329,7 @@
           <p:cNvPr id="4" name="スライド番号プレースホルダー 3">
             <a:extLst>
               <a:ext uri="{FF2B5EF4-FFF2-40B4-BE49-F238E27FC236}">
-                <a16:creationId xmlns:a16="http://schemas.microsoft.com/office/drawing/2014/main" id="{997D2C1B-9406-8BB1-9945-C1BBB2C77EDF}"/>
+                <a16:creationId xmlns:a16="http://schemas.microsoft.com/office/drawing/2014/main" id="{2F3FDBF2-5EA6-BEA0-68B2-11E5D4853004}"/>
               </a:ext>
             </a:extLst>
           </p:cNvPr>
@@ -2345,7 +2345,7 @@
           <a:bodyPr/>
           <a:lstStyle/>
           <a:p>
-            <a:fld id="{680129E2-1D9C-4741-8125-9461CCD80C3B}" type="slidenum">
+            <a:fld id="{BAB24A02-E561-4B89-B255-7D54E268628B}" type="slidenum">
               <a:rPr kumimoji="1" lang="ja-JP" altLang="en-US" smtClean="0"/>
               <a:t>‹#›</a:t>
             </a:fld>
@@ -2356,7 +2356,7 @@
     </p:spTree>
     <p:extLst>
       <p:ext uri="{BB962C8B-B14F-4D97-AF65-F5344CB8AC3E}">
-        <p14:creationId xmlns:p14="http://schemas.microsoft.com/office/powerpoint/2010/main" val="2809711095"/>
+        <p14:creationId xmlns:p14="http://schemas.microsoft.com/office/powerpoint/2010/main" val="3250752840"/>
       </p:ext>
     </p:extLst>
   </p:cSld>
@@ -2388,7 +2388,7 @@
           <p:cNvPr id="2" name="タイトル 1">
             <a:extLst>
               <a:ext uri="{FF2B5EF4-FFF2-40B4-BE49-F238E27FC236}">
-                <a16:creationId xmlns:a16="http://schemas.microsoft.com/office/drawing/2014/main" id="{F9AF4510-91EC-7ACE-3E8F-20F90549E318}"/>
+                <a16:creationId xmlns:a16="http://schemas.microsoft.com/office/drawing/2014/main" id="{B7970758-25CC-E7F4-BEFD-D0041F864E5E}"/>
               </a:ext>
             </a:extLst>
           </p:cNvPr>
@@ -2425,7 +2425,7 @@
           <p:cNvPr id="3" name="コンテンツ プレースホルダー 2">
             <a:extLst>
               <a:ext uri="{FF2B5EF4-FFF2-40B4-BE49-F238E27FC236}">
-                <a16:creationId xmlns:a16="http://schemas.microsoft.com/office/drawing/2014/main" id="{2C9E3086-5206-B427-60F3-7830B9A5AEE9}"/>
+                <a16:creationId xmlns:a16="http://schemas.microsoft.com/office/drawing/2014/main" id="{A0929842-5120-3F1D-5846-C7EFE63DDE14}"/>
               </a:ext>
             </a:extLst>
           </p:cNvPr>
@@ -2547,7 +2547,7 @@
           <p:cNvPr id="4" name="テキスト プレースホルダー 3">
             <a:extLst>
               <a:ext uri="{FF2B5EF4-FFF2-40B4-BE49-F238E27FC236}">
-                <a16:creationId xmlns:a16="http://schemas.microsoft.com/office/drawing/2014/main" id="{69B44165-A653-478A-0D1E-1D7856032316}"/>
+                <a16:creationId xmlns:a16="http://schemas.microsoft.com/office/drawing/2014/main" id="{705EE196-79B0-1897-E206-26FA7E339866}"/>
               </a:ext>
             </a:extLst>
           </p:cNvPr>
@@ -2618,7 +2618,7 @@
           <p:cNvPr id="5" name="日付プレースホルダー 4">
             <a:extLst>
               <a:ext uri="{FF2B5EF4-FFF2-40B4-BE49-F238E27FC236}">
-                <a16:creationId xmlns:a16="http://schemas.microsoft.com/office/drawing/2014/main" id="{A437BEC1-2743-0619-74A7-CADAED58C8E0}"/>
+                <a16:creationId xmlns:a16="http://schemas.microsoft.com/office/drawing/2014/main" id="{FEE7F0E4-7638-85F4-7785-F932CC3C131E}"/>
               </a:ext>
             </a:extLst>
           </p:cNvPr>
@@ -2634,7 +2634,7 @@
           <a:bodyPr/>
           <a:lstStyle/>
           <a:p>
-            <a:fld id="{984F072A-6D4A-444A-AAC8-CC23CBCE9921}" type="datetimeFigureOut">
+            <a:fld id="{F1F22A08-497F-4176-A7BF-25ACA0E4C96B}" type="datetimeFigureOut">
               <a:rPr kumimoji="1" lang="ja-JP" altLang="en-US" smtClean="0"/>
               <a:t>2026/7/30</a:t>
             </a:fld>
@@ -2647,7 +2647,7 @@
           <p:cNvPr id="6" name="フッター プレースホルダー 5">
             <a:extLst>
               <a:ext uri="{FF2B5EF4-FFF2-40B4-BE49-F238E27FC236}">
-                <a16:creationId xmlns:a16="http://schemas.microsoft.com/office/drawing/2014/main" id="{F96BBFB3-56A5-0457-0A5B-E3C020221455}"/>
+                <a16:creationId xmlns:a16="http://schemas.microsoft.com/office/drawing/2014/main" id="{C923D0E6-AD21-112F-D9FC-9E36AA0936D1}"/>
               </a:ext>
             </a:extLst>
           </p:cNvPr>
@@ -2672,7 +2672,7 @@
           <p:cNvPr id="7" name="スライド番号プレースホルダー 6">
             <a:extLst>
               <a:ext uri="{FF2B5EF4-FFF2-40B4-BE49-F238E27FC236}">
-                <a16:creationId xmlns:a16="http://schemas.microsoft.com/office/drawing/2014/main" id="{7A2F2DD5-2854-1258-B7DE-C4AA96A7A86B}"/>
+                <a16:creationId xmlns:a16="http://schemas.microsoft.com/office/drawing/2014/main" id="{B215148E-D045-FF34-CAC2-6A87C59EF3D8}"/>
               </a:ext>
             </a:extLst>
           </p:cNvPr>
@@ -2688,7 +2688,7 @@
           <a:bodyPr/>
           <a:lstStyle/>
           <a:p>
-            <a:fld id="{680129E2-1D9C-4741-8125-9461CCD80C3B}" type="slidenum">
+            <a:fld id="{BAB24A02-E561-4B89-B255-7D54E268628B}" type="slidenum">
               <a:rPr kumimoji="1" lang="ja-JP" altLang="en-US" smtClean="0"/>
               <a:t>‹#›</a:t>
             </a:fld>
@@ -2699,7 +2699,7 @@
     </p:spTree>
     <p:extLst>
       <p:ext uri="{BB962C8B-B14F-4D97-AF65-F5344CB8AC3E}">
-        <p14:creationId xmlns:p14="http://schemas.microsoft.com/office/powerpoint/2010/main" val="416834134"/>
+        <p14:creationId xmlns:p14="http://schemas.microsoft.com/office/powerpoint/2010/main" val="2737902876"/>
       </p:ext>
     </p:extLst>
   </p:cSld>
@@ -2731,7 +2731,7 @@
           <p:cNvPr id="2" name="タイトル 1">
             <a:extLst>
               <a:ext uri="{FF2B5EF4-FFF2-40B4-BE49-F238E27FC236}">
-                <a16:creationId xmlns:a16="http://schemas.microsoft.com/office/drawing/2014/main" id="{E380CB3C-2A91-C916-A9EB-643DFF13FBB7}"/>
+                <a16:creationId xmlns:a16="http://schemas.microsoft.com/office/drawing/2014/main" id="{51B9BAE6-3637-EC19-571A-31339C17AFF4}"/>
               </a:ext>
             </a:extLst>
           </p:cNvPr>
@@ -2768,7 +2768,7 @@
           <p:cNvPr id="3" name="図プレースホルダー 2">
             <a:extLst>
               <a:ext uri="{FF2B5EF4-FFF2-40B4-BE49-F238E27FC236}">
-                <a16:creationId xmlns:a16="http://schemas.microsoft.com/office/drawing/2014/main" id="{D6D4DE3C-4ED3-7476-FB04-7A64754832F6}"/>
+                <a16:creationId xmlns:a16="http://schemas.microsoft.com/office/drawing/2014/main" id="{7D757952-05C0-6264-C4AB-EEDEAC291526}"/>
               </a:ext>
             </a:extLst>
           </p:cNvPr>
@@ -2835,7 +2835,7 @@
           <p:cNvPr id="4" name="テキスト プレースホルダー 3">
             <a:extLst>
               <a:ext uri="{FF2B5EF4-FFF2-40B4-BE49-F238E27FC236}">
-                <a16:creationId xmlns:a16="http://schemas.microsoft.com/office/drawing/2014/main" id="{C64A35E7-161E-0E03-E285-F3C42CACC340}"/>
+                <a16:creationId xmlns:a16="http://schemas.microsoft.com/office/drawing/2014/main" id="{5AE83B3B-FD36-4C1E-E548-1F5AF8ABE45A}"/>
               </a:ext>
             </a:extLst>
           </p:cNvPr>
@@ -2906,7 +2906,7 @@
           <p:cNvPr id="5" name="日付プレースホルダー 4">
             <a:extLst>
               <a:ext uri="{FF2B5EF4-FFF2-40B4-BE49-F238E27FC236}">
-                <a16:creationId xmlns:a16="http://schemas.microsoft.com/office/drawing/2014/main" id="{796C7BB4-3111-5291-1C70-D0057CCD3D41}"/>
+                <a16:creationId xmlns:a16="http://schemas.microsoft.com/office/drawing/2014/main" id="{BDB9EF4B-6B81-DFF9-64CC-C58279C6B0FF}"/>
               </a:ext>
             </a:extLst>
           </p:cNvPr>
@@ -2922,7 +2922,7 @@
           <a:bodyPr/>
           <a:lstStyle/>
           <a:p>
-            <a:fld id="{984F072A-6D4A-444A-AAC8-CC23CBCE9921}" type="datetimeFigureOut">
+            <a:fld id="{F1F22A08-497F-4176-A7BF-25ACA0E4C96B}" type="datetimeFigureOut">
               <a:rPr kumimoji="1" lang="ja-JP" altLang="en-US" smtClean="0"/>
               <a:t>2026/7/30</a:t>
             </a:fld>
@@ -2935,7 +2935,7 @@
           <p:cNvPr id="6" name="フッター プレースホルダー 5">
             <a:extLst>
               <a:ext uri="{FF2B5EF4-FFF2-40B4-BE49-F238E27FC236}">
-                <a16:creationId xmlns:a16="http://schemas.microsoft.com/office/drawing/2014/main" id="{82C0FE37-218F-E33A-8EDF-3FEDC959FD87}"/>
+                <a16:creationId xmlns:a16="http://schemas.microsoft.com/office/drawing/2014/main" id="{60C9FFAC-8FDB-8840-9E1D-6D4F5F740A5D}"/>
               </a:ext>
             </a:extLst>
           </p:cNvPr>
@@ -2960,7 +2960,7 @@
           <p:cNvPr id="7" name="スライド番号プレースホルダー 6">
             <a:extLst>
               <a:ext uri="{FF2B5EF4-FFF2-40B4-BE49-F238E27FC236}">
-                <a16:creationId xmlns:a16="http://schemas.microsoft.com/office/drawing/2014/main" id="{BDC6D620-709E-174E-3BB2-8212B30E5E2F}"/>
+                <a16:creationId xmlns:a16="http://schemas.microsoft.com/office/drawing/2014/main" id="{EE68E30F-3D3B-4356-75A9-FBFAA770E0B4}"/>
               </a:ext>
             </a:extLst>
           </p:cNvPr>
@@ -2976,7 +2976,7 @@
           <a:bodyPr/>
           <a:lstStyle/>
           <a:p>
-            <a:fld id="{680129E2-1D9C-4741-8125-9461CCD80C3B}" type="slidenum">
+            <a:fld id="{BAB24A02-E561-4B89-B255-7D54E268628B}" type="slidenum">
               <a:rPr kumimoji="1" lang="ja-JP" altLang="en-US" smtClean="0"/>
               <a:t>‹#›</a:t>
             </a:fld>
@@ -2987,7 +2987,7 @@
     </p:spTree>
     <p:extLst>
       <p:ext uri="{BB962C8B-B14F-4D97-AF65-F5344CB8AC3E}">
-        <p14:creationId xmlns:p14="http://schemas.microsoft.com/office/powerpoint/2010/main" val="2135739245"/>
+        <p14:creationId xmlns:p14="http://schemas.microsoft.com/office/powerpoint/2010/main" val="1272490893"/>
       </p:ext>
     </p:extLst>
   </p:cSld>
@@ -3024,7 +3024,7 @@
           <p:cNvPr id="2" name="タイトル プレースホルダー 1">
             <a:extLst>
               <a:ext uri="{FF2B5EF4-FFF2-40B4-BE49-F238E27FC236}">
-                <a16:creationId xmlns:a16="http://schemas.microsoft.com/office/drawing/2014/main" id="{0510AEEB-D872-1865-F674-0BA703FDB91D}"/>
+                <a16:creationId xmlns:a16="http://schemas.microsoft.com/office/drawing/2014/main" id="{8DF5BD6B-7AA6-F4F2-7887-73312B029DA2}"/>
               </a:ext>
             </a:extLst>
           </p:cNvPr>
@@ -3062,7 +3062,7 @@
           <p:cNvPr id="3" name="テキスト プレースホルダー 2">
             <a:extLst>
               <a:ext uri="{FF2B5EF4-FFF2-40B4-BE49-F238E27FC236}">
-                <a16:creationId xmlns:a16="http://schemas.microsoft.com/office/drawing/2014/main" id="{8F9C0385-7ED4-B4ED-427F-C2348263791D}"/>
+                <a16:creationId xmlns:a16="http://schemas.microsoft.com/office/drawing/2014/main" id="{123D5896-B786-606D-95CA-7D1596EC8D43}"/>
               </a:ext>
             </a:extLst>
           </p:cNvPr>
@@ -3161,7 +3161,7 @@
           <p:cNvPr id="4" name="日付プレースホルダー 3">
             <a:extLst>
               <a:ext uri="{FF2B5EF4-FFF2-40B4-BE49-F238E27FC236}">
-                <a16:creationId xmlns:a16="http://schemas.microsoft.com/office/drawing/2014/main" id="{F0D9F218-8F04-F6DF-46FE-D3E68C7AEEAC}"/>
+                <a16:creationId xmlns:a16="http://schemas.microsoft.com/office/drawing/2014/main" id="{8498782E-4D3C-C0CB-4BD5-C09CE585FEA1}"/>
               </a:ext>
             </a:extLst>
           </p:cNvPr>
@@ -3195,7 +3195,7 @@
             </a:lvl1pPr>
           </a:lstStyle>
           <a:p>
-            <a:fld id="{984F072A-6D4A-444A-AAC8-CC23CBCE9921}" type="datetimeFigureOut">
+            <a:fld id="{F1F22A08-497F-4176-A7BF-25ACA0E4C96B}" type="datetimeFigureOut">
               <a:rPr kumimoji="1" lang="ja-JP" altLang="en-US" smtClean="0"/>
               <a:t>2026/7/30</a:t>
             </a:fld>
@@ -3208,7 +3208,7 @@
           <p:cNvPr id="5" name="フッター プレースホルダー 4">
             <a:extLst>
               <a:ext uri="{FF2B5EF4-FFF2-40B4-BE49-F238E27FC236}">
-                <a16:creationId xmlns:a16="http://schemas.microsoft.com/office/drawing/2014/main" id="{92AFF8A2-37F6-0BEE-B05B-A1100A548B40}"/>
+                <a16:creationId xmlns:a16="http://schemas.microsoft.com/office/drawing/2014/main" id="{B80F30CA-DFFC-5757-D300-8D5B2094A9FB}"/>
               </a:ext>
             </a:extLst>
           </p:cNvPr>
@@ -3251,7 +3251,7 @@
           <p:cNvPr id="6" name="スライド番号プレースホルダー 5">
             <a:extLst>
               <a:ext uri="{FF2B5EF4-FFF2-40B4-BE49-F238E27FC236}">
-                <a16:creationId xmlns:a16="http://schemas.microsoft.com/office/drawing/2014/main" id="{A7D12AAD-85C3-3D93-CA6E-8A7F56F6C394}"/>
+                <a16:creationId xmlns:a16="http://schemas.microsoft.com/office/drawing/2014/main" id="{9856D752-923E-033A-CA64-ABB3F0DF886A}"/>
               </a:ext>
             </a:extLst>
           </p:cNvPr>
@@ -3285,7 +3285,7 @@
             </a:lvl1pPr>
           </a:lstStyle>
           <a:p>
-            <a:fld id="{680129E2-1D9C-4741-8125-9461CCD80C3B}" type="slidenum">
+            <a:fld id="{BAB24A02-E561-4B89-B255-7D54E268628B}" type="slidenum">
               <a:rPr kumimoji="1" lang="ja-JP" altLang="en-US" smtClean="0"/>
               <a:t>‹#›</a:t>
             </a:fld>
@@ -3296,7 +3296,7 @@
     </p:spTree>
     <p:extLst>
       <p:ext uri="{BB962C8B-B14F-4D97-AF65-F5344CB8AC3E}">
-        <p14:creationId xmlns:p14="http://schemas.microsoft.com/office/powerpoint/2010/main" val="1578282725"/>
+        <p14:creationId xmlns:p14="http://schemas.microsoft.com/office/powerpoint/2010/main" val="167400713"/>
       </p:ext>
     </p:extLst>
   </p:cSld>
@@ -3619,7 +3619,7 @@
           <p:cNvPr id="2" name="テキスト ボックス 1">
             <a:extLst>
               <a:ext uri="{FF2B5EF4-FFF2-40B4-BE49-F238E27FC236}">
-                <a16:creationId xmlns:a16="http://schemas.microsoft.com/office/drawing/2014/main" id="{031080D2-19AB-4354-87A2-7B16BA31C261}"/>
+                <a16:creationId xmlns:a16="http://schemas.microsoft.com/office/drawing/2014/main" id="{3C025275-9D7D-BD87-459C-6419D87874D5}"/>
               </a:ext>
             </a:extLst>
           </p:cNvPr>
@@ -3665,7 +3665,7 @@
           <p:cNvPr id="3" name="テキスト ボックス 2">
             <a:extLst>
               <a:ext uri="{FF2B5EF4-FFF2-40B4-BE49-F238E27FC236}">
-                <a16:creationId xmlns:a16="http://schemas.microsoft.com/office/drawing/2014/main" id="{8E7B05B8-006D-C83C-E2AB-6B7940B3658E}"/>
+                <a16:creationId xmlns:a16="http://schemas.microsoft.com/office/drawing/2014/main" id="{E694E1E5-519E-66CC-3E8B-3454F47E1641}"/>
               </a:ext>
             </a:extLst>
           </p:cNvPr>
@@ -3714,7 +3714,7 @@
           <p:cNvPr id="4" name="テキスト ボックス 3">
             <a:extLst>
               <a:ext uri="{FF2B5EF4-FFF2-40B4-BE49-F238E27FC236}">
-                <a16:creationId xmlns:a16="http://schemas.microsoft.com/office/drawing/2014/main" id="{CA7A3DDE-1931-B12B-E860-11F79B0B6ABC}"/>
+                <a16:creationId xmlns:a16="http://schemas.microsoft.com/office/drawing/2014/main" id="{64F1A792-687C-4DC6-A546-16C6BF4309A7}"/>
               </a:ext>
             </a:extLst>
           </p:cNvPr>
@@ -3754,7 +3754,7 @@
           <p:cNvPr id="5" name="テキスト ボックス 4">
             <a:extLst>
               <a:ext uri="{FF2B5EF4-FFF2-40B4-BE49-F238E27FC236}">
-                <a16:creationId xmlns:a16="http://schemas.microsoft.com/office/drawing/2014/main" id="{E0E8A99C-46AE-F265-2FD6-20F11FFAEB05}"/>
+                <a16:creationId xmlns:a16="http://schemas.microsoft.com/office/drawing/2014/main" id="{6FD526AF-5027-CB7D-9D08-4E599A102421}"/>
               </a:ext>
             </a:extLst>
           </p:cNvPr>
@@ -3801,7 +3801,7 @@
             <a:hlinkClick r:id="" action="ppaction://media"/>
             <a:extLst>
               <a:ext uri="{FF2B5EF4-FFF2-40B4-BE49-F238E27FC236}">
-                <a16:creationId xmlns:a16="http://schemas.microsoft.com/office/drawing/2014/main" id="{35FC06DA-CCD1-DFEB-9469-73DE497523FD}"/>
+                <a16:creationId xmlns:a16="http://schemas.microsoft.com/office/drawing/2014/main" id="{B8FCB6AF-7965-F179-EE39-6360087E710D}"/>
               </a:ext>
             </a:extLst>
           </p:cNvPr>
@@ -3836,7 +3836,7 @@
     </p:spTree>
     <p:extLst>
       <p:ext uri="{BB962C8B-B14F-4D97-AF65-F5344CB8AC3E}">
-        <p14:creationId xmlns:p14="http://schemas.microsoft.com/office/powerpoint/2010/main" val="2476338673"/>
+        <p14:creationId xmlns:p14="http://schemas.microsoft.com/office/powerpoint/2010/main" val="1789335719"/>
       </p:ext>
     </p:extLst>
   </p:cSld>
@@ -3960,7 +3960,7 @@
           <p:cNvPr id="2" name="テキスト ボックス 1">
             <a:extLst>
               <a:ext uri="{FF2B5EF4-FFF2-40B4-BE49-F238E27FC236}">
-                <a16:creationId xmlns:a16="http://schemas.microsoft.com/office/drawing/2014/main" id="{2B49B7B5-9540-62B8-5579-DFE5D3717C95}"/>
+                <a16:creationId xmlns:a16="http://schemas.microsoft.com/office/drawing/2014/main" id="{D4FC88D7-5865-288E-161A-4D7363D2105F}"/>
               </a:ext>
             </a:extLst>
           </p:cNvPr>
@@ -4006,7 +4006,7 @@
           <p:cNvPr id="3" name="テキスト ボックス 2">
             <a:extLst>
               <a:ext uri="{FF2B5EF4-FFF2-40B4-BE49-F238E27FC236}">
-                <a16:creationId xmlns:a16="http://schemas.microsoft.com/office/drawing/2014/main" id="{4F959334-64CF-4E2A-335D-F5C952941200}"/>
+                <a16:creationId xmlns:a16="http://schemas.microsoft.com/office/drawing/2014/main" id="{5E874028-90A7-4219-1E49-47807B9BEAFB}"/>
               </a:ext>
             </a:extLst>
           </p:cNvPr>
@@ -4046,7 +4046,7 @@
           <p:cNvPr id="4" name="テキスト ボックス 3">
             <a:extLst>
               <a:ext uri="{FF2B5EF4-FFF2-40B4-BE49-F238E27FC236}">
-                <a16:creationId xmlns:a16="http://schemas.microsoft.com/office/drawing/2014/main" id="{B8F28DF3-13F4-589E-36E6-3DCFB3C6C580}"/>
+                <a16:creationId xmlns:a16="http://schemas.microsoft.com/office/drawing/2014/main" id="{2C22ACF6-210F-7A56-C33F-80623585EF7E}"/>
               </a:ext>
             </a:extLst>
           </p:cNvPr>
@@ -4076,14 +4076,17 @@
                 </a:solidFill>
                 <a:latin typeface="Arial" panose="020B0604020202020204" pitchFamily="34" charset="0"/>
               </a:rPr>
-              <a:t>About Laravel Laravel is a web application framework with expressive, elegant syntax</a:t>
-            </a:r>
-            <a:endParaRPr kumimoji="1" lang="ja-JP" altLang="en-US" sz="2000">
-              <a:solidFill>
-                <a:srgbClr val="333333"/>
-              </a:solidFill>
-              <a:latin typeface="Arial" panose="020B0604020202020204" pitchFamily="34" charset="0"/>
-            </a:endParaRPr>
+              <a:t>Camp Hikaku</a:t>
+            </a:r>
+            <a:r>
+              <a:rPr kumimoji="1" lang="ja-JP" altLang="en-US" sz="2000">
+                <a:solidFill>
+                  <a:srgbClr val="333333"/>
+                </a:solidFill>
+                <a:latin typeface="Arial" panose="020B0604020202020204" pitchFamily="34" charset="0"/>
+              </a:rPr>
+              <a:t>の目的、構成、実装を公開コードから確認できるプロジェクトです。</a:t>
+            </a:r>
           </a:p>
         </p:txBody>
       </p:sp>
@@ -4092,7 +4095,7 @@
           <p:cNvPr id="5" name="テキスト ボックス 4">
             <a:extLst>
               <a:ext uri="{FF2B5EF4-FFF2-40B4-BE49-F238E27FC236}">
-                <a16:creationId xmlns:a16="http://schemas.microsoft.com/office/drawing/2014/main" id="{F37EB27E-95C2-A9C9-3502-4D2BD95B3FEC}"/>
+                <a16:creationId xmlns:a16="http://schemas.microsoft.com/office/drawing/2014/main" id="{5CEFED34-85BB-A8A3-8981-00E517DD5B31}"/>
               </a:ext>
             </a:extLst>
           </p:cNvPr>
@@ -4139,7 +4142,7 @@
             <a:hlinkClick r:id="" action="ppaction://media"/>
             <a:extLst>
               <a:ext uri="{FF2B5EF4-FFF2-40B4-BE49-F238E27FC236}">
-                <a16:creationId xmlns:a16="http://schemas.microsoft.com/office/drawing/2014/main" id="{06D95604-33E9-D080-876E-1E60722DCE58}"/>
+                <a16:creationId xmlns:a16="http://schemas.microsoft.com/office/drawing/2014/main" id="{7FFCF353-3BCF-FAA2-6384-F12DE052E55B}"/>
               </a:ext>
             </a:extLst>
           </p:cNvPr>
@@ -4174,7 +4177,7 @@
     </p:spTree>
     <p:extLst>
       <p:ext uri="{BB962C8B-B14F-4D97-AF65-F5344CB8AC3E}">
-        <p14:creationId xmlns:p14="http://schemas.microsoft.com/office/powerpoint/2010/main" val="2805751593"/>
+        <p14:creationId xmlns:p14="http://schemas.microsoft.com/office/powerpoint/2010/main" val="3084224764"/>
       </p:ext>
     </p:extLst>
   </p:cSld>
@@ -4217,7 +4220,7 @@
                                   <p:childTnLst>
                                     <p:cmd type="call" cmd="playFrom(0.0)">
                                       <p:cBhvr>
-                                        <p:cTn id="6" dur="7780" fill="hold"/>
+                                        <p:cTn id="6" dur="7026" fill="hold"/>
                                         <p:tgtEl>
                                           <p:spTgt spid="6"/>
                                         </p:tgtEl>
@@ -4298,7 +4301,7 @@
           <p:cNvPr id="2" name="テキスト ボックス 1">
             <a:extLst>
               <a:ext uri="{FF2B5EF4-FFF2-40B4-BE49-F238E27FC236}">
-                <a16:creationId xmlns:a16="http://schemas.microsoft.com/office/drawing/2014/main" id="{E7D99096-67B6-2323-6C75-D0A82A7B5A82}"/>
+                <a16:creationId xmlns:a16="http://schemas.microsoft.com/office/drawing/2014/main" id="{B26440E4-34E5-69F7-CBA4-84447CA6283E}"/>
               </a:ext>
             </a:extLst>
           </p:cNvPr>
@@ -4344,7 +4347,7 @@
           <p:cNvPr id="3" name="テキスト ボックス 2">
             <a:extLst>
               <a:ext uri="{FF2B5EF4-FFF2-40B4-BE49-F238E27FC236}">
-                <a16:creationId xmlns:a16="http://schemas.microsoft.com/office/drawing/2014/main" id="{6A924201-73F4-E2BB-C88D-8D9AA56D7CB1}"/>
+                <a16:creationId xmlns:a16="http://schemas.microsoft.com/office/drawing/2014/main" id="{F4CB7716-0446-C8F6-F173-6E5A2994C80F}"/>
               </a:ext>
             </a:extLst>
           </p:cNvPr>
@@ -4384,7 +4387,7 @@
           <p:cNvPr id="4" name="テキスト ボックス 3">
             <a:extLst>
               <a:ext uri="{FF2B5EF4-FFF2-40B4-BE49-F238E27FC236}">
-                <a16:creationId xmlns:a16="http://schemas.microsoft.com/office/drawing/2014/main" id="{CB9150E0-346F-FD34-D096-302E612AAD27}"/>
+                <a16:creationId xmlns:a16="http://schemas.microsoft.com/office/drawing/2014/main" id="{B6387997-189F-D704-702C-08B8ABA2CBD9}"/>
               </a:ext>
             </a:extLst>
           </p:cNvPr>
@@ -4497,7 +4500,7 @@
           <p:cNvPr id="5" name="テキスト ボックス 4">
             <a:extLst>
               <a:ext uri="{FF2B5EF4-FFF2-40B4-BE49-F238E27FC236}">
-                <a16:creationId xmlns:a16="http://schemas.microsoft.com/office/drawing/2014/main" id="{BA3272B8-EF85-939B-3755-3FF5730834EF}"/>
+                <a16:creationId xmlns:a16="http://schemas.microsoft.com/office/drawing/2014/main" id="{63E95911-38BC-647F-5842-B69AF7BEA714}"/>
               </a:ext>
             </a:extLst>
           </p:cNvPr>
@@ -4544,7 +4547,7 @@
             <a:hlinkClick r:id="" action="ppaction://media"/>
             <a:extLst>
               <a:ext uri="{FF2B5EF4-FFF2-40B4-BE49-F238E27FC236}">
-                <a16:creationId xmlns:a16="http://schemas.microsoft.com/office/drawing/2014/main" id="{37A4044D-12DC-3A66-32E9-9F5DFBD9345B}"/>
+                <a16:creationId xmlns:a16="http://schemas.microsoft.com/office/drawing/2014/main" id="{BC0EF923-F9AE-C030-E14D-311FBDFC8864}"/>
               </a:ext>
             </a:extLst>
           </p:cNvPr>
@@ -4579,7 +4582,7 @@
     </p:spTree>
     <p:extLst>
       <p:ext uri="{BB962C8B-B14F-4D97-AF65-F5344CB8AC3E}">
-        <p14:creationId xmlns:p14="http://schemas.microsoft.com/office/powerpoint/2010/main" val="2331451016"/>
+        <p14:creationId xmlns:p14="http://schemas.microsoft.com/office/powerpoint/2010/main" val="1659597067"/>
       </p:ext>
     </p:extLst>
   </p:cSld>
@@ -4703,7 +4706,7 @@
           <p:cNvPr id="2" name="テキスト ボックス 1">
             <a:extLst>
               <a:ext uri="{FF2B5EF4-FFF2-40B4-BE49-F238E27FC236}">
-                <a16:creationId xmlns:a16="http://schemas.microsoft.com/office/drawing/2014/main" id="{AE84259C-B900-45C0-43EF-5FECF8E59B6C}"/>
+                <a16:creationId xmlns:a16="http://schemas.microsoft.com/office/drawing/2014/main" id="{111CAC00-4D66-EBC9-483D-769FF0EE8386}"/>
               </a:ext>
             </a:extLst>
           </p:cNvPr>
@@ -4749,7 +4752,7 @@
           <p:cNvPr id="3" name="テキスト ボックス 2">
             <a:extLst>
               <a:ext uri="{FF2B5EF4-FFF2-40B4-BE49-F238E27FC236}">
-                <a16:creationId xmlns:a16="http://schemas.microsoft.com/office/drawing/2014/main" id="{AC0022D5-BFE2-16BD-E459-2BC4CA941531}"/>
+                <a16:creationId xmlns:a16="http://schemas.microsoft.com/office/drawing/2014/main" id="{4E32971D-8C77-AD17-C3EC-C7308B0B142C}"/>
               </a:ext>
             </a:extLst>
           </p:cNvPr>
@@ -4789,7 +4792,7 @@
           <p:cNvPr id="4" name="テキスト ボックス 3">
             <a:extLst>
               <a:ext uri="{FF2B5EF4-FFF2-40B4-BE49-F238E27FC236}">
-                <a16:creationId xmlns:a16="http://schemas.microsoft.com/office/drawing/2014/main" id="{DBF37735-A936-7631-BFF3-C27116EB2E4C}"/>
+                <a16:creationId xmlns:a16="http://schemas.microsoft.com/office/drawing/2014/main" id="{10B85FD6-B63B-97BF-3F84-735B887D6A6B}"/>
               </a:ext>
             </a:extLst>
           </p:cNvPr>
@@ -4899,7 +4902,7 @@
           <p:cNvPr id="5" name="テキスト ボックス 4">
             <a:extLst>
               <a:ext uri="{FF2B5EF4-FFF2-40B4-BE49-F238E27FC236}">
-                <a16:creationId xmlns:a16="http://schemas.microsoft.com/office/drawing/2014/main" id="{0F9410F0-06C2-F25F-5D28-6E9571F480FD}"/>
+                <a16:creationId xmlns:a16="http://schemas.microsoft.com/office/drawing/2014/main" id="{E6F4EEAF-21A3-6D0D-9460-E5EBF76CCFA1}"/>
               </a:ext>
             </a:extLst>
           </p:cNvPr>
@@ -4946,7 +4949,7 @@
             <a:hlinkClick r:id="" action="ppaction://media"/>
             <a:extLst>
               <a:ext uri="{FF2B5EF4-FFF2-40B4-BE49-F238E27FC236}">
-                <a16:creationId xmlns:a16="http://schemas.microsoft.com/office/drawing/2014/main" id="{EE97B223-7F97-DA61-8466-83E9C3F316BB}"/>
+                <a16:creationId xmlns:a16="http://schemas.microsoft.com/office/drawing/2014/main" id="{BC3EE71D-6FE4-3301-7B58-A332A264BF6A}"/>
               </a:ext>
             </a:extLst>
           </p:cNvPr>
@@ -4981,7 +4984,7 @@
     </p:spTree>
     <p:extLst>
       <p:ext uri="{BB962C8B-B14F-4D97-AF65-F5344CB8AC3E}">
-        <p14:creationId xmlns:p14="http://schemas.microsoft.com/office/powerpoint/2010/main" val="3726413760"/>
+        <p14:creationId xmlns:p14="http://schemas.microsoft.com/office/powerpoint/2010/main" val="1728312201"/>
       </p:ext>
     </p:extLst>
   </p:cSld>
@@ -5105,7 +5108,7 @@
           <p:cNvPr id="2" name="テキスト ボックス 1">
             <a:extLst>
               <a:ext uri="{FF2B5EF4-FFF2-40B4-BE49-F238E27FC236}">
-                <a16:creationId xmlns:a16="http://schemas.microsoft.com/office/drawing/2014/main" id="{47586A95-E2BD-2B56-CCFC-800B2FF31FD3}"/>
+                <a16:creationId xmlns:a16="http://schemas.microsoft.com/office/drawing/2014/main" id="{428F46BC-2F4D-11DC-F602-1D9A87AFB97B}"/>
               </a:ext>
             </a:extLst>
           </p:cNvPr>
@@ -5151,7 +5154,7 @@
           <p:cNvPr id="3" name="テキスト ボックス 2">
             <a:extLst>
               <a:ext uri="{FF2B5EF4-FFF2-40B4-BE49-F238E27FC236}">
-                <a16:creationId xmlns:a16="http://schemas.microsoft.com/office/drawing/2014/main" id="{E43C89EA-51FD-F693-B72A-DE8D1017A078}"/>
+                <a16:creationId xmlns:a16="http://schemas.microsoft.com/office/drawing/2014/main" id="{B8594B13-DD61-673C-BE81-93E2B5118190}"/>
               </a:ext>
             </a:extLst>
           </p:cNvPr>
@@ -5191,7 +5194,7 @@
           <p:cNvPr id="4" name="テキスト ボックス 3">
             <a:extLst>
               <a:ext uri="{FF2B5EF4-FFF2-40B4-BE49-F238E27FC236}">
-                <a16:creationId xmlns:a16="http://schemas.microsoft.com/office/drawing/2014/main" id="{5E2DF147-C905-36BB-A545-CEFEBD6E39B7}"/>
+                <a16:creationId xmlns:a16="http://schemas.microsoft.com/office/drawing/2014/main" id="{6CF9075A-F328-7FB8-06A4-267BD7791EF6}"/>
               </a:ext>
             </a:extLst>
           </p:cNvPr>
@@ -5221,43 +5224,7 @@
                 </a:solidFill>
                 <a:latin typeface="Arial" panose="020B0604020202020204" pitchFamily="34" charset="0"/>
               </a:rPr>
-              <a:t>キャンプ場</a:t>
-            </a:r>
-            <a:r>
-              <a:rPr kumimoji="1" lang="en-US" altLang="ja-JP" sz="2000">
-                <a:solidFill>
-                  <a:srgbClr val="333333"/>
-                </a:solidFill>
-                <a:latin typeface="Arial" panose="020B0604020202020204" pitchFamily="34" charset="0"/>
-              </a:rPr>
-              <a:t>UGC</a:t>
-            </a:r>
-            <a:r>
-              <a:rPr kumimoji="1" lang="ja-JP" altLang="en-US" sz="2000">
-                <a:solidFill>
-                  <a:srgbClr val="333333"/>
-                </a:solidFill>
-                <a:latin typeface="Arial" panose="020B0604020202020204" pitchFamily="34" charset="0"/>
-              </a:rPr>
-              <a:t>空き状況マップ＋</a:t>
-            </a:r>
-            <a:r>
-              <a:rPr kumimoji="1" lang="en-US" altLang="ja-JP" sz="2000">
-                <a:solidFill>
-                  <a:srgbClr val="333333"/>
-                </a:solidFill>
-                <a:latin typeface="Arial" panose="020B0604020202020204" pitchFamily="34" charset="0"/>
-              </a:rPr>
-              <a:t>LINE</a:t>
-            </a:r>
-            <a:r>
-              <a:rPr kumimoji="1" lang="ja-JP" altLang="en-US" sz="2000">
-                <a:solidFill>
-                  <a:srgbClr val="333333"/>
-                </a:solidFill>
-                <a:latin typeface="Arial" panose="020B0604020202020204" pitchFamily="34" charset="0"/>
-              </a:rPr>
-              <a:t>通知を新規構築</a:t>
+              <a:t>直近のコミットでは、実装の見直しと継続的な改善が行われました。</a:t>
             </a:r>
           </a:p>
         </p:txBody>
@@ -5267,7 +5234,7 @@
           <p:cNvPr id="5" name="テキスト ボックス 4">
             <a:extLst>
               <a:ext uri="{FF2B5EF4-FFF2-40B4-BE49-F238E27FC236}">
-                <a16:creationId xmlns:a16="http://schemas.microsoft.com/office/drawing/2014/main" id="{2281F14A-E5FE-11E3-4644-3BA2960C65F9}"/>
+                <a16:creationId xmlns:a16="http://schemas.microsoft.com/office/drawing/2014/main" id="{98D20BC0-C422-F068-CA8B-427A9E6EB3BC}"/>
               </a:ext>
             </a:extLst>
           </p:cNvPr>
@@ -5314,7 +5281,7 @@
             <a:hlinkClick r:id="" action="ppaction://media"/>
             <a:extLst>
               <a:ext uri="{FF2B5EF4-FFF2-40B4-BE49-F238E27FC236}">
-                <a16:creationId xmlns:a16="http://schemas.microsoft.com/office/drawing/2014/main" id="{E80BB8AD-B163-07DA-F7EC-29687DFD05F1}"/>
+                <a16:creationId xmlns:a16="http://schemas.microsoft.com/office/drawing/2014/main" id="{A012E2CC-ABE8-F8B8-698E-281046078E25}"/>
               </a:ext>
             </a:extLst>
           </p:cNvPr>
@@ -5349,7 +5316,7 @@
     </p:spTree>
     <p:extLst>
       <p:ext uri="{BB962C8B-B14F-4D97-AF65-F5344CB8AC3E}">
-        <p14:creationId xmlns:p14="http://schemas.microsoft.com/office/powerpoint/2010/main" val="1741193559"/>
+        <p14:creationId xmlns:p14="http://schemas.microsoft.com/office/powerpoint/2010/main" val="1817438673"/>
       </p:ext>
     </p:extLst>
   </p:cSld>
@@ -5358,10 +5325,10 @@
   </p:clrMapOvr>
   <mc:AlternateContent xmlns:mc="http://schemas.openxmlformats.org/markup-compatibility/2006">
     <mc:Choice xmlns:p14="http://schemas.microsoft.com/office/powerpoint/2010/main" Requires="p14">
-      <p:transition spd="slow" p14:dur="2000" advTm="9000"/>
+      <p:transition spd="slow" p14:dur="2000" advTm="7000"/>
     </mc:Choice>
     <mc:Fallback>
-      <p:transition spd="slow" advTm="9000"/>
+      <p:transition spd="slow" advTm="7000"/>
     </mc:Fallback>
   </mc:AlternateContent>
   <p:timing>
@@ -5392,7 +5359,7 @@
                                   <p:childTnLst>
                                     <p:cmd type="call" cmd="playFrom(0.0)">
                                       <p:cBhvr>
-                                        <p:cTn id="6" dur="8775" fill="hold"/>
+                                        <p:cTn id="6" dur="6076" fill="hold"/>
                                         <p:tgtEl>
                                           <p:spTgt spid="6"/>
                                         </p:tgtEl>
@@ -5473,7 +5440,7 @@
           <p:cNvPr id="2" name="テキスト ボックス 1">
             <a:extLst>
               <a:ext uri="{FF2B5EF4-FFF2-40B4-BE49-F238E27FC236}">
-                <a16:creationId xmlns:a16="http://schemas.microsoft.com/office/drawing/2014/main" id="{5A4A27C0-B102-7886-9350-276520B3A616}"/>
+                <a16:creationId xmlns:a16="http://schemas.microsoft.com/office/drawing/2014/main" id="{A98272F2-E1C7-B0C6-3038-C70A33BDB725}"/>
               </a:ext>
             </a:extLst>
           </p:cNvPr>
@@ -5519,7 +5486,7 @@
           <p:cNvPr id="3" name="テキスト ボックス 2">
             <a:extLst>
               <a:ext uri="{FF2B5EF4-FFF2-40B4-BE49-F238E27FC236}">
-                <a16:creationId xmlns:a16="http://schemas.microsoft.com/office/drawing/2014/main" id="{5213C856-B820-5E1A-9CEF-925F9F8CA297}"/>
+                <a16:creationId xmlns:a16="http://schemas.microsoft.com/office/drawing/2014/main" id="{39A0BC75-6E63-0115-6F32-F9A41C5E086F}"/>
               </a:ext>
             </a:extLst>
           </p:cNvPr>
@@ -5559,7 +5526,7 @@
           <p:cNvPr id="4" name="テキスト ボックス 3">
             <a:extLst>
               <a:ext uri="{FF2B5EF4-FFF2-40B4-BE49-F238E27FC236}">
-                <a16:creationId xmlns:a16="http://schemas.microsoft.com/office/drawing/2014/main" id="{7D1BCB76-57A7-B666-232D-D7EC306BE85E}"/>
+                <a16:creationId xmlns:a16="http://schemas.microsoft.com/office/drawing/2014/main" id="{8BBE6E60-B47C-2F3F-7816-7B40DFF649D4}"/>
               </a:ext>
             </a:extLst>
           </p:cNvPr>
@@ -5624,7 +5591,7 @@
           <p:cNvPr id="5" name="テキスト ボックス 4">
             <a:extLst>
               <a:ext uri="{FF2B5EF4-FFF2-40B4-BE49-F238E27FC236}">
-                <a16:creationId xmlns:a16="http://schemas.microsoft.com/office/drawing/2014/main" id="{CC62CD77-2403-A108-852D-130CF271634B}"/>
+                <a16:creationId xmlns:a16="http://schemas.microsoft.com/office/drawing/2014/main" id="{0248255C-8356-45CE-F576-15A3C88C3660}"/>
               </a:ext>
             </a:extLst>
           </p:cNvPr>
@@ -5671,7 +5638,7 @@
             <a:hlinkClick r:id="" action="ppaction://media"/>
             <a:extLst>
               <a:ext uri="{FF2B5EF4-FFF2-40B4-BE49-F238E27FC236}">
-                <a16:creationId xmlns:a16="http://schemas.microsoft.com/office/drawing/2014/main" id="{93988156-82B5-4E19-31BF-65F413C7ED17}"/>
+                <a16:creationId xmlns:a16="http://schemas.microsoft.com/office/drawing/2014/main" id="{80E815B5-E661-1418-8A7B-A1DFC1D360FB}"/>
               </a:ext>
             </a:extLst>
           </p:cNvPr>
@@ -5706,7 +5673,7 @@
     </p:spTree>
     <p:extLst>
       <p:ext uri="{BB962C8B-B14F-4D97-AF65-F5344CB8AC3E}">
-        <p14:creationId xmlns:p14="http://schemas.microsoft.com/office/powerpoint/2010/main" val="412208104"/>
+        <p14:creationId xmlns:p14="http://schemas.microsoft.com/office/powerpoint/2010/main" val="1868771933"/>
       </p:ext>
     </p:extLst>
   </p:cSld>
